--- a/public/poster-template-a1.pptx
+++ b/public/poster-template-a1.pptx
@@ -110,6 +110,9 @@
   <p:extLst>
     <p:ext uri="{EFAFB233-063F-42B5-8137-9DF3F51BA10A}">
       <p15:sldGuideLst xmlns:p15="http://schemas.microsoft.com/office/powerpoint/2012/main"/>
+    </p:ext>
+    <p:ext uri="{2D200454-40CA-4A62-9FC3-DE9A4176ACB9}">
+      <p15:notesGuideLst xmlns:p15="http://schemas.microsoft.com/office/powerpoint/2012/main"/>
     </p:ext>
   </p:extLst>
 </p:presentation>
@@ -1224,14 +1227,14 @@
             </a:lvl9pPr>
           </a:lstStyle>
           <a:p>
-            <a:pPr algn="ctr"/>
+            <a:pPr algn="l"/>
             <a:r>
               <a:rPr lang="pl-PL" sz="5940" dirty="0">
                 <a:latin typeface="ADLaM Display" panose="02010000000000000000" pitchFamily="2" charset="0"/>
                 <a:ea typeface="ADLaM Display" panose="02010000000000000000" pitchFamily="2" charset="0"/>
                 <a:cs typeface="ADLaM Display" panose="02010000000000000000" pitchFamily="2" charset="0"/>
               </a:rPr>
-              <a:t>US – POLAND</a:t>
+              <a:t>                          US – POLAND</a:t>
             </a:r>
           </a:p>
           <a:p>
